--- a/InsightAI_Challenge3_AI_Design_Neo4j_KG.pptx
+++ b/InsightAI_Challenge3_AI_Design_Neo4j_KG.pptx
@@ -6771,7 +6771,7 @@
       </p:sp>
       <p:pic>
         <p:nvPicPr>
-          <p:cNvPr id="5" name="Picture 4" descr="neo4j_multihop_query_result.png"/>
+          <p:cNvPr id="5" name="Picture 4" descr="user_actual_neo4j_multihop_screenshot.png"/>
           <p:cNvPicPr>
             <a:picLocks noChangeAspect="1"/>
           </p:cNvPicPr>
